--- a/weeks/2026-09-28/decks/Sabio_Merck_Omnicom_Deals_9.30.26.pptx
+++ b/weeks/2026-09-28/decks/Sabio_Merck_Omnicom_Deals_9.30.26.pptx
@@ -3065,7 +3065,7 @@
       </p:sp>
       <p:pic>
         <p:nvPicPr>
-          <p:cNvPr id="7" name="Image 0" descr="/home/user/Sabio-Deck-Builders-/assets/sabio-logo-white.png">    </p:cNvPr>
+          <p:cNvPr id="7" name="Image 0" descr="/home/user/Sabio-Deck-Builders-/assets/sabio-logo-white-sm.png">    </p:cNvPr>
           <p:cNvPicPr>
             <a:picLocks noChangeAspect="1"/>
           </p:cNvPicPr>
@@ -4218,7 +4218,7 @@
       </p:sp>
       <p:pic>
         <p:nvPicPr>
-          <p:cNvPr id="7" name="Image 0" descr="/home/user/Sabio-Deck-Builders-/assets/sabio-logo-white.png">    </p:cNvPr>
+          <p:cNvPr id="7" name="Image 0" descr="/home/user/Sabio-Deck-Builders-/assets/sabio-logo-white-sm.png">    </p:cNvPr>
           <p:cNvPicPr>
             <a:picLocks noChangeAspect="1"/>
           </p:cNvPicPr>
@@ -5059,7 +5059,7 @@
       </p:sp>
       <p:pic>
         <p:nvPicPr>
-          <p:cNvPr id="7" name="Image 0" descr="/home/user/Sabio-Deck-Builders-/assets/sabio-logo-white.png">    </p:cNvPr>
+          <p:cNvPr id="7" name="Image 0" descr="/home/user/Sabio-Deck-Builders-/assets/sabio-logo-white-sm.png">    </p:cNvPr>
           <p:cNvPicPr>
             <a:picLocks noChangeAspect="1"/>
           </p:cNvPicPr>
@@ -5889,7 +5889,7 @@
       </p:sp>
       <p:pic>
         <p:nvPicPr>
-          <p:cNvPr id="6" name="Image 0" descr="/home/user/Sabio-Deck-Builders-/assets/sabio-logo-white.png">    </p:cNvPr>
+          <p:cNvPr id="6" name="Image 0" descr="/home/user/Sabio-Deck-Builders-/assets/sabio-logo-white-sm.png">    </p:cNvPr>
           <p:cNvPicPr>
             <a:picLocks noChangeAspect="1"/>
           </p:cNvPicPr>
@@ -7215,7 +7215,7 @@
       </p:sp>
       <p:pic>
         <p:nvPicPr>
-          <p:cNvPr id="6" name="Image 0" descr="/home/user/Sabio-Deck-Builders-/assets/sabio-logo-white.png">    </p:cNvPr>
+          <p:cNvPr id="6" name="Image 0" descr="/home/user/Sabio-Deck-Builders-/assets/sabio-logo-white-sm.png">    </p:cNvPr>
           <p:cNvPicPr>
             <a:picLocks noChangeAspect="1"/>
           </p:cNvPicPr>
@@ -7612,7 +7612,7 @@
       </p:sp>
       <p:pic>
         <p:nvPicPr>
-          <p:cNvPr id="5" name="Image 0" descr="/home/user/Sabio-Deck-Builders-/assets/sabio-logo-white.png">    </p:cNvPr>
+          <p:cNvPr id="5" name="Image 0" descr="/home/user/Sabio-Deck-Builders-/assets/sabio-logo-white-sm.png">    </p:cNvPr>
           <p:cNvPicPr>
             <a:picLocks noChangeAspect="1"/>
           </p:cNvPicPr>
@@ -8446,7 +8446,7 @@
       </p:sp>
       <p:pic>
         <p:nvPicPr>
-          <p:cNvPr id="6" name="Image 0" descr="/home/user/Sabio-Deck-Builders-/assets/sabio-logo-white.png">    </p:cNvPr>
+          <p:cNvPr id="6" name="Image 0" descr="/home/user/Sabio-Deck-Builders-/assets/sabio-logo-white-sm.png">    </p:cNvPr>
           <p:cNvPicPr>
             <a:picLocks noChangeAspect="1"/>
           </p:cNvPicPr>
@@ -9638,7 +9638,7 @@
       </p:sp>
       <p:pic>
         <p:nvPicPr>
-          <p:cNvPr id="6" name="Image 0" descr="/home/user/Sabio-Deck-Builders-/assets/sabio-logo-white.png">    </p:cNvPr>
+          <p:cNvPr id="6" name="Image 0" descr="/home/user/Sabio-Deck-Builders-/assets/sabio-logo-white-sm.png">    </p:cNvPr>
           <p:cNvPicPr>
             <a:picLocks noChangeAspect="1"/>
           </p:cNvPicPr>
@@ -10265,7 +10265,7 @@
       </p:sp>
       <p:pic>
         <p:nvPicPr>
-          <p:cNvPr id="6" name="Image 0" descr="/home/user/Sabio-Deck-Builders-/assets/sabio-logo-white.png">    </p:cNvPr>
+          <p:cNvPr id="6" name="Image 0" descr="/home/user/Sabio-Deck-Builders-/assets/sabio-logo-white-sm.png">    </p:cNvPr>
           <p:cNvPicPr>
             <a:picLocks noChangeAspect="1"/>
           </p:cNvPicPr>
@@ -11343,7 +11343,7 @@
       </p:sp>
       <p:pic>
         <p:nvPicPr>
-          <p:cNvPr id="7" name="Image 0" descr="/home/user/Sabio-Deck-Builders-/assets/sabio-logo-white.png">    </p:cNvPr>
+          <p:cNvPr id="7" name="Image 0" descr="/home/user/Sabio-Deck-Builders-/assets/sabio-logo-white-sm.png">    </p:cNvPr>
           <p:cNvPicPr>
             <a:picLocks noChangeAspect="1"/>
           </p:cNvPicPr>
@@ -12680,7 +12680,7 @@
       </p:sp>
       <p:pic>
         <p:nvPicPr>
-          <p:cNvPr id="7" name="Image 0" descr="/home/user/Sabio-Deck-Builders-/assets/sabio-logo-white.png">    </p:cNvPr>
+          <p:cNvPr id="7" name="Image 0" descr="/home/user/Sabio-Deck-Builders-/assets/sabio-logo-white-sm.png">    </p:cNvPr>
           <p:cNvPicPr>
             <a:picLocks noChangeAspect="1"/>
           </p:cNvPicPr>
@@ -13112,7 +13112,7 @@
       </p:sp>
       <p:pic>
         <p:nvPicPr>
-          <p:cNvPr id="7" name="Image 0" descr="/home/user/Sabio-Deck-Builders-/assets/sabio-logo-white.png">    </p:cNvPr>
+          <p:cNvPr id="7" name="Image 0" descr="/home/user/Sabio-Deck-Builders-/assets/sabio-logo-white-sm.png">    </p:cNvPr>
           <p:cNvPicPr>
             <a:picLocks noChangeAspect="1"/>
           </p:cNvPicPr>
@@ -13927,7 +13927,7 @@
       </p:sp>
       <p:pic>
         <p:nvPicPr>
-          <p:cNvPr id="6" name="Image 0" descr="/home/user/Sabio-Deck-Builders-/assets/sabio-logo-white.png">    </p:cNvPr>
+          <p:cNvPr id="6" name="Image 0" descr="/home/user/Sabio-Deck-Builders-/assets/sabio-logo-white-sm.png">    </p:cNvPr>
           <p:cNvPicPr>
             <a:picLocks noChangeAspect="1"/>
           </p:cNvPicPr>
